--- a/presentation.pptx
+++ b/presentation.pptx
@@ -4925,378 +4925,180 @@
           </a:bodyPr>
           <a:lstStyle/>
           <a:p>
-            <a:pPr marL="0" lvl="0" indent="0" algn="l" rtl="0">
-              <a:lnSpc>
-                <a:spcPct val="150000"/>
-              </a:lnSpc>
-              <a:spcBef>
-                <a:spcPts val="0"/>
-              </a:spcBef>
-              <a:spcAft>
-                <a:spcPts val="0"/>
-              </a:spcAft>
-              <a:buClr>
-                <a:schemeClr val="dk1"/>
-              </a:buClr>
-              <a:buSzPts val="1100"/>
-              <a:buFont typeface="Arial"/>
+            <a:pPr marL="158750" indent="0">
               <a:buNone/>
             </a:pPr>
             <a:r>
-              <a:rPr lang="en-US" sz="900" b="1">
-                <a:solidFill>
-                  <a:schemeClr val="dk1"/>
-                </a:solidFill>
-                <a:latin typeface="Calibri"/>
-                <a:ea typeface="Calibri"/>
-                <a:cs typeface="Calibri"/>
-                <a:sym typeface="Calibri"/>
+              <a:rPr lang="en-US" altLang="zh-CN" sz="1200" b="0" dirty="0">
+                <a:effectLst/>
+                <a:latin typeface="Helvetica Neue" panose="02000503000000020004" pitchFamily="2" charset="0"/>
               </a:rPr>
               <a:t>For sensitivity analysis, we re-ran the sampler under three alternative prior configurations.</a:t>
             </a:r>
-            <a:endParaRPr sz="900" b="1">
-              <a:solidFill>
-                <a:schemeClr val="dk1"/>
-              </a:solidFill>
-              <a:latin typeface="Calibri"/>
-              <a:ea typeface="Calibri"/>
-              <a:cs typeface="Calibri"/>
-              <a:sym typeface="Calibri"/>
+          </a:p>
+          <a:p>
+            <a:pPr marL="158750" indent="0">
+              <a:buNone/>
+            </a:pPr>
+            <a:endParaRPr lang="en-US" altLang="zh-CN" sz="1200" b="0" dirty="0">
+              <a:effectLst/>
+              <a:latin typeface="Helvetica Neue" panose="02000503000000020004" pitchFamily="2" charset="0"/>
             </a:endParaRPr>
           </a:p>
           <a:p>
-            <a:pPr marL="0" lvl="0" indent="0" algn="l" rtl="0">
-              <a:lnSpc>
-                <a:spcPct val="150000"/>
-              </a:lnSpc>
-              <a:spcBef>
-                <a:spcPts val="0"/>
-              </a:spcBef>
-              <a:spcAft>
-                <a:spcPts val="0"/>
-              </a:spcAft>
-              <a:buClr>
-                <a:schemeClr val="dk1"/>
-              </a:buClr>
-              <a:buSzPts val="1100"/>
-              <a:buFont typeface="Arial"/>
-              <a:buNone/>
-            </a:pPr>
-            <a:endParaRPr sz="900" b="1">
-              <a:solidFill>
-                <a:schemeClr val="dk1"/>
-              </a:solidFill>
-              <a:latin typeface="Calibri"/>
-              <a:ea typeface="Calibri"/>
-              <a:cs typeface="Calibri"/>
-              <a:sym typeface="Calibri"/>
+            <a:pPr marL="158750" indent="0">
+              <a:buNone/>
+            </a:pPr>
+            <a:r>
+              <a:rPr lang="en-US" altLang="zh-CN" sz="1200" b="0" dirty="0">
+                <a:effectLst/>
+                <a:latin typeface="Helvetica Neue" panose="02000503000000020004" pitchFamily="2" charset="0"/>
+              </a:rPr>
+              <a:t>Our baseline uses a weakly informative prior, designed to prevent parameter divergence while avoiding overly restrictive assumptions on the data.</a:t>
+            </a:r>
+          </a:p>
+          <a:p>
+            <a:pPr marL="158750" indent="0">
+              <a:buNone/>
+            </a:pPr>
+            <a:endParaRPr lang="en-US" altLang="zh-CN" sz="1200" b="0" dirty="0">
+              <a:effectLst/>
+              <a:latin typeface="Helvetica Neue" panose="02000503000000020004" pitchFamily="2" charset="0"/>
             </a:endParaRPr>
           </a:p>
           <a:p>
-            <a:pPr marL="0" lvl="0" indent="0" algn="l" rtl="0">
-              <a:lnSpc>
-                <a:spcPct val="150000"/>
-              </a:lnSpc>
-              <a:spcBef>
-                <a:spcPts val="0"/>
-              </a:spcBef>
-              <a:spcAft>
-                <a:spcPts val="0"/>
-              </a:spcAft>
-              <a:buClr>
-                <a:schemeClr val="dk1"/>
-              </a:buClr>
-              <a:buSzPts val="1100"/>
-              <a:buFont typeface="Arial"/>
+            <a:pPr marL="158750" indent="0">
               <a:buNone/>
             </a:pPr>
             <a:r>
-              <a:rPr lang="en-US" sz="900" b="1">
-                <a:solidFill>
-                  <a:schemeClr val="dk1"/>
-                </a:solidFill>
-                <a:latin typeface="Calibri"/>
-                <a:ea typeface="Calibri"/>
-                <a:cs typeface="Calibri"/>
-                <a:sym typeface="Calibri"/>
+              <a:rPr lang="en-US" altLang="zh-CN" sz="1200" b="0" dirty="0">
+                <a:effectLst/>
+                <a:latin typeface="Helvetica Neue" panose="02000503000000020004" pitchFamily="2" charset="0"/>
               </a:rPr>
               <a:t>In A1, we doubled the fixed-effect prior standard deviation from 2.5 to 5.0, making the beta priors even more diffuse.</a:t>
             </a:r>
-            <a:endParaRPr sz="900" b="1">
-              <a:solidFill>
-                <a:schemeClr val="dk1"/>
-              </a:solidFill>
-              <a:latin typeface="Calibri"/>
-              <a:ea typeface="Calibri"/>
-              <a:cs typeface="Calibri"/>
-              <a:sym typeface="Calibri"/>
+          </a:p>
+          <a:p>
+            <a:pPr marL="158750" indent="0">
+              <a:buNone/>
+            </a:pPr>
+            <a:endParaRPr lang="en-US" altLang="zh-CN" sz="1200" b="0" dirty="0">
+              <a:effectLst/>
+              <a:latin typeface="Helvetica Neue" panose="02000503000000020004" pitchFamily="2" charset="0"/>
             </a:endParaRPr>
           </a:p>
           <a:p>
-            <a:pPr marL="0" lvl="0" indent="0" algn="l" rtl="0">
-              <a:lnSpc>
-                <a:spcPct val="150000"/>
-              </a:lnSpc>
-              <a:spcBef>
-                <a:spcPts val="0"/>
-              </a:spcBef>
-              <a:spcAft>
-                <a:spcPts val="0"/>
-              </a:spcAft>
-              <a:buClr>
-                <a:schemeClr val="dk1"/>
-              </a:buClr>
-              <a:buSzPts val="1100"/>
-              <a:buFont typeface="Arial"/>
-              <a:buNone/>
-            </a:pPr>
-            <a:endParaRPr sz="900" b="1">
-              <a:solidFill>
-                <a:schemeClr val="dk1"/>
-              </a:solidFill>
-              <a:latin typeface="Calibri"/>
-              <a:ea typeface="Calibri"/>
-              <a:cs typeface="Calibri"/>
-              <a:sym typeface="Calibri"/>
+            <a:pPr marL="158750" indent="0">
+              <a:buNone/>
+            </a:pPr>
+            <a:r>
+              <a:rPr lang="en-US" altLang="zh-CN" sz="1200" b="0" dirty="0">
+                <a:effectLst/>
+                <a:latin typeface="Helvetica Neue" panose="02000503000000020004" pitchFamily="2" charset="0"/>
+              </a:rPr>
+              <a:t>This allows us to assess whether the posterior is data-dominated or sensitive to prior specification; the near invariance of results suggests strong data dominance.</a:t>
+            </a:r>
+          </a:p>
+          <a:p>
+            <a:pPr marL="158750" indent="0">
+              <a:buNone/>
+            </a:pPr>
+            <a:endParaRPr lang="en-US" altLang="zh-CN" sz="1200" b="0" dirty="0">
+              <a:effectLst/>
+              <a:latin typeface="Helvetica Neue" panose="02000503000000020004" pitchFamily="2" charset="0"/>
             </a:endParaRPr>
           </a:p>
           <a:p>
-            <a:pPr marL="0" lvl="0" indent="0" algn="l" rtl="0">
-              <a:lnSpc>
-                <a:spcPct val="150000"/>
-              </a:lnSpc>
-              <a:spcBef>
-                <a:spcPts val="0"/>
-              </a:spcBef>
-              <a:spcAft>
-                <a:spcPts val="0"/>
-              </a:spcAft>
-              <a:buClr>
-                <a:schemeClr val="dk1"/>
-              </a:buClr>
-              <a:buSzPts val="1100"/>
-              <a:buFont typeface="Arial"/>
+            <a:pPr marL="158750" indent="0">
               <a:buNone/>
             </a:pPr>
             <a:r>
-              <a:rPr lang="en-US" sz="900" b="1">
-                <a:solidFill>
-                  <a:schemeClr val="dk1"/>
-                </a:solidFill>
-                <a:latin typeface="Calibri"/>
-                <a:ea typeface="Calibri"/>
-                <a:cs typeface="Calibri"/>
-                <a:sym typeface="Calibri"/>
+              <a:rPr lang="en-US" altLang="zh-CN" sz="1200" b="0" dirty="0">
+                <a:effectLst/>
+                <a:latin typeface="Helvetica Neue" panose="02000503000000020004" pitchFamily="2" charset="0"/>
               </a:rPr>
-              <a:t>In B1, we widened the tau hyperprior to Half-Normal with scale 2.5 instead of 1.0.</a:t>
+              <a:t>In B1, we widened the tau hyperprior to Half-Normal with scale 2.5 instead of 1.0, thereby allowing for greater between-group variation.</a:t>
             </a:r>
-            <a:endParaRPr sz="900" b="1">
-              <a:solidFill>
-                <a:schemeClr val="dk1"/>
-              </a:solidFill>
-              <a:latin typeface="Calibri"/>
-              <a:ea typeface="Calibri"/>
-              <a:cs typeface="Calibri"/>
-              <a:sym typeface="Calibri"/>
+          </a:p>
+          <a:p>
+            <a:pPr marL="158750" indent="0">
+              <a:buNone/>
+            </a:pPr>
+            <a:endParaRPr lang="en-US" altLang="zh-CN" sz="1200" b="0" dirty="0">
+              <a:effectLst/>
+              <a:latin typeface="Helvetica Neue" panose="02000503000000020004" pitchFamily="2" charset="0"/>
             </a:endParaRPr>
           </a:p>
           <a:p>
-            <a:pPr marL="0" lvl="0" indent="0" algn="l" rtl="0">
-              <a:lnSpc>
-                <a:spcPct val="150000"/>
-              </a:lnSpc>
-              <a:spcBef>
-                <a:spcPts val="0"/>
-              </a:spcBef>
-              <a:spcAft>
-                <a:spcPts val="0"/>
-              </a:spcAft>
-              <a:buClr>
-                <a:schemeClr val="dk1"/>
-              </a:buClr>
-              <a:buSzPts val="1100"/>
-              <a:buFont typeface="Arial"/>
-              <a:buNone/>
-            </a:pPr>
-            <a:endParaRPr sz="900" b="1">
-              <a:solidFill>
-                <a:schemeClr val="dk1"/>
-              </a:solidFill>
-              <a:latin typeface="Calibri"/>
-              <a:ea typeface="Calibri"/>
-              <a:cs typeface="Calibri"/>
-              <a:sym typeface="Calibri"/>
-            </a:endParaRPr>
-          </a:p>
-          <a:p>
-            <a:pPr marL="0" lvl="0" indent="0" algn="l" rtl="0">
-              <a:lnSpc>
-                <a:spcPct val="150000"/>
-              </a:lnSpc>
-              <a:spcBef>
-                <a:spcPts val="0"/>
-              </a:spcBef>
-              <a:spcAft>
-                <a:spcPts val="0"/>
-              </a:spcAft>
-              <a:buClr>
-                <a:schemeClr val="dk1"/>
-              </a:buClr>
-              <a:buSzPts val="1100"/>
-              <a:buFont typeface="Arial"/>
+            <a:pPr marL="158750" indent="0">
               <a:buNone/>
             </a:pPr>
             <a:r>
-              <a:rPr lang="en-US" sz="900" b="1">
-                <a:solidFill>
-                  <a:schemeClr val="dk1"/>
-                </a:solidFill>
-                <a:latin typeface="Calibri"/>
-                <a:ea typeface="Calibri"/>
-                <a:cs typeface="Calibri"/>
-                <a:sym typeface="Calibri"/>
+              <a:rPr lang="en-US" altLang="zh-CN" sz="1200" b="0" dirty="0">
+                <a:effectLst/>
+                <a:latin typeface="Helvetica Neue" panose="02000503000000020004" pitchFamily="2" charset="0"/>
               </a:rPr>
               <a:t>In B2, we switched the tau hyperprior to a Half-Cauchy distribution with scale 2.5, which has heavier tails and puts more prior mass on large values of tau.</a:t>
             </a:r>
-            <a:endParaRPr sz="900" b="1">
-              <a:solidFill>
-                <a:schemeClr val="dk1"/>
-              </a:solidFill>
-              <a:latin typeface="Calibri"/>
-              <a:ea typeface="Calibri"/>
-              <a:cs typeface="Calibri"/>
-              <a:sym typeface="Calibri"/>
+          </a:p>
+          <a:p>
+            <a:pPr marL="158750" indent="0">
+              <a:buNone/>
+            </a:pPr>
+            <a:endParaRPr lang="en-US" altLang="zh-CN" sz="1200" b="0" dirty="0">
+              <a:effectLst/>
+              <a:latin typeface="Helvetica Neue" panose="02000503000000020004" pitchFamily="2" charset="0"/>
             </a:endParaRPr>
           </a:p>
           <a:p>
-            <a:pPr marL="0" lvl="0" indent="0" algn="l" rtl="0">
-              <a:lnSpc>
-                <a:spcPct val="150000"/>
-              </a:lnSpc>
-              <a:spcBef>
-                <a:spcPts val="0"/>
-              </a:spcBef>
-              <a:spcAft>
-                <a:spcPts val="0"/>
-              </a:spcAft>
-              <a:buClr>
-                <a:schemeClr val="dk1"/>
-              </a:buClr>
-              <a:buSzPts val="1100"/>
-              <a:buFont typeface="Arial"/>
-              <a:buNone/>
-            </a:pPr>
-            <a:endParaRPr sz="900" b="1">
-              <a:solidFill>
-                <a:schemeClr val="dk1"/>
-              </a:solidFill>
-              <a:latin typeface="Calibri"/>
-              <a:ea typeface="Calibri"/>
-              <a:cs typeface="Calibri"/>
-              <a:sym typeface="Calibri"/>
+            <a:pPr marL="158750" indent="0">
+              <a:buNone/>
+            </a:pPr>
+            <a:endParaRPr lang="en-US" altLang="zh-CN" sz="1200" b="0" dirty="0">
+              <a:effectLst/>
+              <a:latin typeface="Helvetica Neue" panose="02000503000000020004" pitchFamily="2" charset="0"/>
             </a:endParaRPr>
           </a:p>
           <a:p>
-            <a:pPr marL="0" lvl="0" indent="0" algn="l" rtl="0">
-              <a:lnSpc>
-                <a:spcPct val="150000"/>
-              </a:lnSpc>
-              <a:spcBef>
-                <a:spcPts val="0"/>
-              </a:spcBef>
-              <a:spcAft>
-                <a:spcPts val="0"/>
-              </a:spcAft>
-              <a:buClr>
-                <a:schemeClr val="dk1"/>
-              </a:buClr>
-              <a:buSzPts val="1100"/>
-              <a:buFont typeface="Arial"/>
+            <a:pPr marL="158750" indent="0">
               <a:buNone/>
             </a:pPr>
             <a:r>
-              <a:rPr lang="en-US" sz="900" b="1">
-                <a:solidFill>
-                  <a:schemeClr val="dk1"/>
-                </a:solidFill>
-                <a:latin typeface="Calibri"/>
-                <a:ea typeface="Calibri"/>
-                <a:cs typeface="Calibri"/>
-                <a:sym typeface="Calibri"/>
+              <a:rPr lang="en-US" altLang="zh-CN" sz="1200" b="0" dirty="0">
+                <a:effectLst/>
+                <a:latin typeface="Helvetica Neue" panose="02000503000000020004" pitchFamily="2" charset="0"/>
               </a:rPr>
               <a:t>From the graph, you can see the tau posterior densities under all four configurations overlaid. They are nearly identical. The range of posterior means across configurations is less than 0.05 — essentially negligible.</a:t>
             </a:r>
-            <a:endParaRPr sz="900" b="1">
-              <a:solidFill>
-                <a:schemeClr val="dk1"/>
-              </a:solidFill>
-              <a:latin typeface="Calibri"/>
-              <a:ea typeface="Calibri"/>
-              <a:cs typeface="Calibri"/>
-              <a:sym typeface="Calibri"/>
+          </a:p>
+          <a:p>
+            <a:pPr marL="158750" indent="0">
+              <a:buNone/>
+            </a:pPr>
+            <a:endParaRPr lang="en-US" altLang="zh-CN" sz="1200" b="0" dirty="0">
+              <a:effectLst/>
+              <a:latin typeface="Helvetica Neue" panose="02000503000000020004" pitchFamily="2" charset="0"/>
             </a:endParaRPr>
           </a:p>
           <a:p>
-            <a:pPr marL="0" lvl="0" indent="0" algn="l" rtl="0">
-              <a:lnSpc>
-                <a:spcPct val="150000"/>
-              </a:lnSpc>
-              <a:spcBef>
-                <a:spcPts val="0"/>
-              </a:spcBef>
-              <a:spcAft>
-                <a:spcPts val="0"/>
-              </a:spcAft>
-              <a:buClr>
-                <a:schemeClr val="dk1"/>
-              </a:buClr>
-              <a:buSzPts val="1100"/>
-              <a:buFont typeface="Arial"/>
-              <a:buNone/>
-            </a:pPr>
-            <a:endParaRPr sz="900" b="1">
-              <a:solidFill>
-                <a:schemeClr val="dk1"/>
-              </a:solidFill>
-              <a:latin typeface="Calibri"/>
-              <a:ea typeface="Calibri"/>
-              <a:cs typeface="Calibri"/>
-              <a:sym typeface="Calibri"/>
-            </a:endParaRPr>
-          </a:p>
-          <a:p>
-            <a:pPr marL="0" lvl="0" indent="0" algn="l" rtl="0">
-              <a:lnSpc>
-                <a:spcPct val="150000"/>
-              </a:lnSpc>
-              <a:spcBef>
-                <a:spcPts val="0"/>
-              </a:spcBef>
-              <a:spcAft>
-                <a:spcPts val="0"/>
-              </a:spcAft>
+            <a:pPr marL="158750" indent="0">
               <a:buNone/>
             </a:pPr>
             <a:r>
-              <a:rPr lang="en-US" sz="900" b="1">
-                <a:solidFill>
-                  <a:schemeClr val="dk1"/>
-                </a:solidFill>
-                <a:latin typeface="Calibri"/>
-                <a:ea typeface="Calibri"/>
-                <a:cs typeface="Calibri"/>
-                <a:sym typeface="Calibri"/>
+              <a:rPr lang="en-US" altLang="zh-CN" sz="1200" b="0" dirty="0">
+                <a:effectLst/>
+                <a:latin typeface="Helvetica Neue" panose="02000503000000020004" pitchFamily="2" charset="0"/>
               </a:rPr>
               <a:t>The key fixed-effect estimates also remain stable, with beta variation less than 0.02 across configs. And the specialty rankings — which specialty has the highest or lowest random effect — are highly consistent, with a Spearman correlation above 0.95.</a:t>
             </a:r>
-            <a:endParaRPr sz="900" b="1">
-              <a:solidFill>
-                <a:schemeClr val="dk1"/>
-              </a:solidFill>
-              <a:latin typeface="Calibri"/>
-              <a:ea typeface="Calibri"/>
-              <a:cs typeface="Calibri"/>
-              <a:sym typeface="Calibri"/>
+          </a:p>
+          <a:p>
+            <a:pPr marL="158750" indent="0">
+              <a:buNone/>
+            </a:pPr>
+            <a:endParaRPr lang="en-US" altLang="zh-CN" sz="1200" b="0" dirty="0">
+              <a:effectLst/>
+              <a:latin typeface="Helvetica Neue" panose="02000503000000020004" pitchFamily="2" charset="0"/>
             </a:endParaRPr>
           </a:p>
         </p:txBody>
@@ -5313,8 +5115,8 @@
         </p:nvSpPr>
         <p:spPr>
           <a:xfrm>
-            <a:off x="1143225" y="685800"/>
-            <a:ext cx="4572300" cy="3429000"/>
+            <a:off x="381000" y="685800"/>
+            <a:ext cx="6096000" cy="3429000"/>
           </a:xfrm>
           <a:custGeom>
             <a:avLst/>
@@ -5405,7 +5207,7 @@
               <a:buNone/>
             </a:pPr>
             <a:r>
-              <a:rPr lang="en-US" sz="900" b="1">
+              <a:rPr lang="en-US" sz="900" b="1" dirty="0">
                 <a:solidFill>
                   <a:schemeClr val="dk1"/>
                 </a:solidFill>
@@ -5416,7 +5218,7 @@
               </a:rPr>
               <a:t>The conclusion is clear: our posterior is likelihood-dominated for all key parameters. The data, not the prior, is driving the results. Our findings are robust to the specific choice of prior.</a:t>
             </a:r>
-            <a:endParaRPr/>
+            <a:endParaRPr dirty="0"/>
           </a:p>
         </p:txBody>
       </p:sp>
